--- a/templates/新的报告模板.pptx
+++ b/templates/新的报告模板.pptx
@@ -14,12 +14,10 @@
     <p:sldId id="262" r:id="rId8"/>
     <p:sldId id="263" r:id="rId9"/>
     <p:sldId id="264" r:id="rId10"/>
-    <p:sldId id="265" r:id="rId11"/>
-    <p:sldId id="266" r:id="rId12"/>
-    <p:sldId id="267" r:id="rId13"/>
-    <p:sldId id="268" r:id="rId14"/>
-    <p:sldId id="269" r:id="rId15"/>
-    <p:sldId id="272" r:id="rId16"/>
+    <p:sldId id="266" r:id="rId11"/>
+    <p:sldId id="267" r:id="rId12"/>
+    <p:sldId id="268" r:id="rId13"/>
+    <p:sldId id="269" r:id="rId14"/>
   </p:sldIdLst>
   <p:sldSz cx="12192000" cy="6858000"/>
   <p:notesSz cx="6858000" cy="9144000"/>
@@ -3264,42 +3262,14 @@
       </p:grpSpPr>
       <p:sp>
         <p:nvSpPr>
-          <p:cNvPr id="2" name="Title 1"/>
-          <p:cNvSpPr>
-            <a:spLocks noGrp="1"/>
-          </p:cNvSpPr>
-          <p:nvPr>
-            <p:ph type="title"/>
-          </p:nvPr>
-        </p:nvSpPr>
-        <p:spPr>
-          <a:xfrm>
-            <a:off x="1981047" y="332148"/>
-            <a:ext cx="8229600" cy="1143000"/>
-          </a:xfrm>
-        </p:spPr>
-        <p:txBody>
-          <a:bodyPr/>
-          <a:lstStyle/>
-          <a:p>
-            <a:r>
-              <a:rPr dirty="0" err="1"/>
-              <a:t>异常订单专项排查与分析</a:t>
-            </a:r>
-            <a:endParaRPr dirty="0"/>
-          </a:p>
-        </p:txBody>
-      </p:sp>
-      <p:sp>
-        <p:nvSpPr>
-          <p:cNvPr id="4" name="TABLE:abnormal_orders"/>
+          <p:cNvPr id="4" name="TextBox 3"/>
           <p:cNvSpPr txBox="1"/>
           <p:nvPr/>
         </p:nvSpPr>
         <p:spPr>
           <a:xfrm>
             <a:off x="457200" y="1371600"/>
-            <a:ext cx="11277295" cy="369332"/>
+            <a:ext cx="11277295" cy="402546"/>
           </a:xfrm>
           <a:prstGeom prst="rect">
             <a:avLst/>
@@ -3312,44 +3282,54 @@
           </a:bodyPr>
           <a:lstStyle/>
           <a:p>
+            <a:pPr>
+              <a:lnSpc>
+                <a:spcPct val="120000"/>
+              </a:lnSpc>
+              <a:spcAft>
+                <a:spcPts val="1200"/>
+              </a:spcAft>
+            </a:pPr>
             <a:r>
               <a:rPr dirty="0"/>
-              <a:t>[</a:t>
+              <a:t>{{</a:t>
             </a:r>
             <a:r>
               <a:rPr dirty="0" err="1"/>
-              <a:t>TABLE:abnormal_orders</a:t>
+              <a:t>INSIGHT:conclusion</a:t>
             </a:r>
             <a:r>
               <a:rPr dirty="0"/>
-              <a:t>]</a:t>
-            </a:r>
-          </a:p>
-        </p:txBody>
-      </p:sp>
-      <p:sp>
-        <p:nvSpPr>
-          <p:cNvPr id="5" name="TextBox 4"/>
-          <p:cNvSpPr txBox="1"/>
-          <p:nvPr/>
-        </p:nvSpPr>
-        <p:spPr>
-          <a:xfrm>
-            <a:off x="457200" y="4754880"/>
-            <a:ext cx="11277295" cy="1371600"/>
-          </a:xfrm>
-          <a:prstGeom prst="rect">
-            <a:avLst/>
-          </a:prstGeom>
-          <a:noFill/>
-        </p:spPr>
-        <p:txBody>
-          <a:bodyPr wrap="none">
-            <a:spAutoFit/>
-          </a:bodyPr>
-          <a:lstStyle/>
-          <a:p>
-            <a:endParaRPr/>
+              <a:t>}}</a:t>
+            </a:r>
+          </a:p>
+        </p:txBody>
+      </p:sp>
+      <p:sp>
+        <p:nvSpPr>
+          <p:cNvPr id="2" name="Title 1"/>
+          <p:cNvSpPr>
+            <a:spLocks noGrp="1"/>
+          </p:cNvSpPr>
+          <p:nvPr>
+            <p:ph type="title"/>
+          </p:nvPr>
+        </p:nvSpPr>
+        <p:spPr>
+          <a:xfrm>
+            <a:off x="1981047" y="319240"/>
+            <a:ext cx="8229600" cy="1143000"/>
+          </a:xfrm>
+        </p:spPr>
+        <p:txBody>
+          <a:bodyPr/>
+          <a:lstStyle/>
+          <a:p>
+            <a:r>
+              <a:rPr dirty="0" err="1"/>
+              <a:t>全量分析核心洞察结论</a:t>
+            </a:r>
+            <a:endParaRPr dirty="0"/>
           </a:p>
         </p:txBody>
       </p:sp>
@@ -3414,7 +3394,7 @@
             </a:r>
             <a:r>
               <a:rPr dirty="0" err="1"/>
-              <a:t>INSIGHT:conclusion</a:t>
+              <a:t>INSIGHT:strategy</a:t>
             </a:r>
             <a:r>
               <a:rPr dirty="0"/>
@@ -3435,7 +3415,7 @@
         </p:nvSpPr>
         <p:spPr>
           <a:xfrm>
-            <a:off x="1981047" y="319240"/>
+            <a:off x="1981047" y="284733"/>
             <a:ext cx="8229600" cy="1143000"/>
           </a:xfrm>
         </p:spPr>
@@ -3445,7 +3425,7 @@
           <a:p>
             <a:r>
               <a:rPr dirty="0" err="1"/>
-              <a:t>全量分析核心洞察结论</a:t>
+              <a:t>可落地销售优化策略建议</a:t>
             </a:r>
             <a:endParaRPr dirty="0"/>
           </a:p>
@@ -3478,14 +3458,42 @@
       </p:grpSpPr>
       <p:sp>
         <p:nvSpPr>
+          <p:cNvPr id="2" name="Title 1"/>
+          <p:cNvSpPr>
+            <a:spLocks noGrp="1"/>
+          </p:cNvSpPr>
+          <p:nvPr>
+            <p:ph type="ctrTitle"/>
+          </p:nvPr>
+        </p:nvSpPr>
+        <p:spPr>
+          <a:xfrm>
+            <a:off x="2209647" y="1973053"/>
+            <a:ext cx="7772400" cy="1470025"/>
+          </a:xfrm>
+        </p:spPr>
+        <p:txBody>
+          <a:bodyPr/>
+          <a:lstStyle/>
+          <a:p>
+            <a:r>
+              <a:rPr dirty="0" err="1"/>
+              <a:t>感谢观看</a:t>
+            </a:r>
+            <a:endParaRPr dirty="0"/>
+          </a:p>
+        </p:txBody>
+      </p:sp>
+      <p:sp>
+        <p:nvSpPr>
           <p:cNvPr id="4" name="TextBox 3"/>
           <p:cNvSpPr txBox="1"/>
           <p:nvPr/>
         </p:nvSpPr>
         <p:spPr>
           <a:xfrm>
-            <a:off x="457200" y="1371600"/>
-            <a:ext cx="11277295" cy="402546"/>
+            <a:off x="4439444" y="5943600"/>
+            <a:ext cx="3313112" cy="307777"/>
           </a:xfrm>
           <a:prstGeom prst="rect">
             <a:avLst/>
@@ -3498,52 +3506,24 @@
           </a:bodyPr>
           <a:lstStyle/>
           <a:p>
-            <a:pPr>
-              <a:lnSpc>
-                <a:spcPct val="120000"/>
-              </a:lnSpc>
-              <a:spcAft>
-                <a:spcPts val="1200"/>
-              </a:spcAft>
+            <a:pPr algn="ctr">
+              <a:defRPr sz="1400">
+                <a:solidFill>
+                  <a:srgbClr val="2C3E50"/>
+                </a:solidFill>
+              </a:defRPr>
             </a:pPr>
             <a:r>
-              <a:rPr dirty="0"/>
-              <a:t>{{</a:t>
-            </a:r>
-            <a:r>
-              <a:rPr dirty="0" err="1"/>
-              <a:t>INSIGHT:strategy</a:t>
-            </a:r>
-            <a:r>
-              <a:rPr dirty="0"/>
-              <a:t>}}</a:t>
-            </a:r>
-          </a:p>
-        </p:txBody>
-      </p:sp>
-      <p:sp>
-        <p:nvSpPr>
-          <p:cNvPr id="2" name="Title 1"/>
-          <p:cNvSpPr>
-            <a:spLocks noGrp="1"/>
-          </p:cNvSpPr>
-          <p:nvPr>
-            <p:ph type="title"/>
-          </p:nvPr>
-        </p:nvSpPr>
-        <p:spPr>
-          <a:xfrm>
-            <a:off x="1981047" y="284733"/>
-            <a:ext cx="8229600" cy="1143000"/>
-          </a:xfrm>
-        </p:spPr>
-        <p:txBody>
-          <a:bodyPr/>
-          <a:lstStyle/>
-          <a:p>
-            <a:r>
-              <a:rPr dirty="0" err="1"/>
-              <a:t>可落地销售优化策略建议</a:t>
+              <a:rPr lang="en-US" altLang="zh-CN" sz="1400" dirty="0"/>
+              <a:t>[</a:t>
+            </a:r>
+            <a:r>
+              <a:rPr lang="en-US" altLang="zh-CN" sz="1400" dirty="0" err="1"/>
+              <a:t>DATE:report_date</a:t>
+            </a:r>
+            <a:r>
+              <a:rPr lang="en-US" altLang="zh-CN" sz="1400" dirty="0"/>
+              <a:t>]</a:t>
             </a:r>
             <a:endParaRPr dirty="0"/>
           </a:p>
@@ -3576,104 +3556,6 @@
       </p:grpSpPr>
       <p:sp>
         <p:nvSpPr>
-          <p:cNvPr id="2" name="Title 1"/>
-          <p:cNvSpPr>
-            <a:spLocks noGrp="1"/>
-          </p:cNvSpPr>
-          <p:nvPr>
-            <p:ph type="ctrTitle"/>
-          </p:nvPr>
-        </p:nvSpPr>
-        <p:spPr>
-          <a:xfrm>
-            <a:off x="2209647" y="1973053"/>
-            <a:ext cx="7772400" cy="1470025"/>
-          </a:xfrm>
-        </p:spPr>
-        <p:txBody>
-          <a:bodyPr/>
-          <a:lstStyle/>
-          <a:p>
-            <a:r>
-              <a:rPr dirty="0" err="1"/>
-              <a:t>感谢观看</a:t>
-            </a:r>
-            <a:endParaRPr dirty="0"/>
-          </a:p>
-        </p:txBody>
-      </p:sp>
-      <p:sp>
-        <p:nvSpPr>
-          <p:cNvPr id="4" name="TextBox 3"/>
-          <p:cNvSpPr txBox="1"/>
-          <p:nvPr/>
-        </p:nvSpPr>
-        <p:spPr>
-          <a:xfrm>
-            <a:off x="4439444" y="5943600"/>
-            <a:ext cx="3313112" cy="307777"/>
-          </a:xfrm>
-          <a:prstGeom prst="rect">
-            <a:avLst/>
-          </a:prstGeom>
-          <a:noFill/>
-        </p:spPr>
-        <p:txBody>
-          <a:bodyPr wrap="square">
-            <a:spAutoFit/>
-          </a:bodyPr>
-          <a:lstStyle/>
-          <a:p>
-            <a:pPr algn="ctr">
-              <a:defRPr sz="1400">
-                <a:solidFill>
-                  <a:srgbClr val="2C3E50"/>
-                </a:solidFill>
-              </a:defRPr>
-            </a:pPr>
-            <a:r>
-              <a:rPr lang="en-US" altLang="zh-CN" sz="1400" dirty="0"/>
-              <a:t>[</a:t>
-            </a:r>
-            <a:r>
-              <a:rPr lang="en-US" altLang="zh-CN" sz="1400" dirty="0" err="1"/>
-              <a:t>DATE:report_date</a:t>
-            </a:r>
-            <a:r>
-              <a:rPr lang="en-US" altLang="zh-CN" sz="1400" dirty="0"/>
-              <a:t>]</a:t>
-            </a:r>
-            <a:endParaRPr dirty="0"/>
-          </a:p>
-        </p:txBody>
-      </p:sp>
-    </p:spTree>
-  </p:cSld>
-  <p:clrMapOvr>
-    <a:masterClrMapping/>
-  </p:clrMapOvr>
-</p:sld>
-</file>
-
-<file path=ppt/slides/slide14.xml><?xml version="1.0" encoding="utf-8"?>
-<p:sld xmlns:a="http://schemas.openxmlformats.org/drawingml/2006/main" xmlns:r="http://schemas.openxmlformats.org/officeDocument/2006/relationships" xmlns:p="http://schemas.openxmlformats.org/presentationml/2006/main">
-  <p:cSld>
-    <p:spTree>
-      <p:nvGrpSpPr>
-        <p:cNvPr id="1" name=""/>
-        <p:cNvGrpSpPr/>
-        <p:nvPr/>
-      </p:nvGrpSpPr>
-      <p:grpSpPr>
-        <a:xfrm>
-          <a:off x="0" y="0"/>
-          <a:ext cx="0" cy="0"/>
-          <a:chOff x="0" y="0"/>
-          <a:chExt cx="0" cy="0"/>
-        </a:xfrm>
-      </p:grpSpPr>
-      <p:sp>
-        <p:nvSpPr>
           <p:cNvPr id="2" name="矩形 1">
             <a:extLst>
               <a:ext uri="{FF2B5EF4-FFF2-40B4-BE49-F238E27FC236}">
@@ -3808,142 +3690,6 @@
     <p:extLst>
       <p:ext uri="{BB962C8B-B14F-4D97-AF65-F5344CB8AC3E}">
         <p14:creationId xmlns:p14="http://schemas.microsoft.com/office/powerpoint/2010/main" val="68283920"/>
-      </p:ext>
-    </p:extLst>
-  </p:cSld>
-  <p:clrMapOvr>
-    <a:masterClrMapping/>
-  </p:clrMapOvr>
-</p:sld>
-</file>
-
-<file path=ppt/slides/slide15.xml><?xml version="1.0" encoding="utf-8"?>
-<p:sld xmlns:a="http://schemas.openxmlformats.org/drawingml/2006/main" xmlns:r="http://schemas.openxmlformats.org/officeDocument/2006/relationships" xmlns:p="http://schemas.openxmlformats.org/presentationml/2006/main">
-  <p:cSld>
-    <p:spTree>
-      <p:nvGrpSpPr>
-        <p:cNvPr id="1" name="">
-          <a:extLst>
-            <a:ext uri="{FF2B5EF4-FFF2-40B4-BE49-F238E27FC236}">
-              <a16:creationId xmlns:a16="http://schemas.microsoft.com/office/drawing/2014/main" id="{22EF56E4-8158-2D57-07EC-3B9E815EBCB9}"/>
-            </a:ext>
-          </a:extLst>
-        </p:cNvPr>
-        <p:cNvGrpSpPr/>
-        <p:nvPr/>
-      </p:nvGrpSpPr>
-      <p:grpSpPr>
-        <a:xfrm>
-          <a:off x="0" y="0"/>
-          <a:ext cx="0" cy="0"/>
-          <a:chOff x="0" y="0"/>
-          <a:chExt cx="0" cy="0"/>
-        </a:xfrm>
-      </p:grpSpPr>
-      <p:sp>
-        <p:nvSpPr>
-          <p:cNvPr id="2" name="矩形 1">
-            <a:extLst>
-              <a:ext uri="{FF2B5EF4-FFF2-40B4-BE49-F238E27FC236}">
-                <a16:creationId xmlns:a16="http://schemas.microsoft.com/office/drawing/2014/main" id="{31719BC4-BCF6-5626-55E1-A585248D91C0}"/>
-              </a:ext>
-            </a:extLst>
-          </p:cNvPr>
-          <p:cNvSpPr/>
-          <p:nvPr/>
-        </p:nvSpPr>
-        <p:spPr>
-          <a:xfrm>
-            <a:off x="457200" y="1202267"/>
-            <a:ext cx="6620934" cy="4292600"/>
-          </a:xfrm>
-          <a:prstGeom prst="rect">
-            <a:avLst/>
-          </a:prstGeom>
-        </p:spPr>
-        <p:style>
-          <a:lnRef idx="1">
-            <a:schemeClr val="accent1"/>
-          </a:lnRef>
-          <a:fillRef idx="3">
-            <a:schemeClr val="accent1"/>
-          </a:fillRef>
-          <a:effectRef idx="2">
-            <a:schemeClr val="accent1"/>
-          </a:effectRef>
-          <a:fontRef idx="minor">
-            <a:schemeClr val="lt1"/>
-          </a:fontRef>
-        </p:style>
-        <p:txBody>
-          <a:bodyPr rtlCol="0" anchor="ctr"/>
-          <a:lstStyle/>
-          <a:p>
-            <a:pPr algn="ctr"/>
-            <a:r>
-              <a:rPr lang="en-US" altLang="zh-CN" dirty="0"/>
-              <a:t>[</a:t>
-            </a:r>
-            <a:r>
-              <a:rPr lang="en-US" altLang="zh-CN" dirty="0" err="1"/>
-              <a:t>CHART:age_scatter</a:t>
-            </a:r>
-            <a:r>
-              <a:rPr lang="en-US" altLang="zh-CN" dirty="0"/>
-              <a:t>]</a:t>
-            </a:r>
-            <a:endParaRPr lang="zh-CN" altLang="en-US" dirty="0"/>
-          </a:p>
-        </p:txBody>
-      </p:sp>
-      <p:sp>
-        <p:nvSpPr>
-          <p:cNvPr id="5" name="文本框 4">
-            <a:extLst>
-              <a:ext uri="{FF2B5EF4-FFF2-40B4-BE49-F238E27FC236}">
-                <a16:creationId xmlns:a16="http://schemas.microsoft.com/office/drawing/2014/main" id="{BD9D3181-4D8D-3F3B-C120-06CD2958191F}"/>
-              </a:ext>
-            </a:extLst>
-          </p:cNvPr>
-          <p:cNvSpPr txBox="1"/>
-          <p:nvPr/>
-        </p:nvSpPr>
-        <p:spPr>
-          <a:xfrm>
-            <a:off x="7780866" y="1386933"/>
-            <a:ext cx="3208867" cy="369332"/>
-          </a:xfrm>
-          <a:prstGeom prst="rect">
-            <a:avLst/>
-          </a:prstGeom>
-          <a:noFill/>
-        </p:spPr>
-        <p:txBody>
-          <a:bodyPr wrap="square" rtlCol="0">
-            <a:spAutoFit/>
-          </a:bodyPr>
-          <a:lstStyle/>
-          <a:p>
-            <a:r>
-              <a:rPr lang="en-US" altLang="zh-CN" dirty="0"/>
-              <a:t>{{</a:t>
-            </a:r>
-            <a:r>
-              <a:rPr lang="en-US" altLang="zh-CN" dirty="0" err="1"/>
-              <a:t>INSIGHT:age_scatter</a:t>
-            </a:r>
-            <a:r>
-              <a:rPr lang="en-US" altLang="zh-CN" dirty="0"/>
-              <a:t>}}</a:t>
-            </a:r>
-            <a:endParaRPr lang="zh-CN" altLang="en-US" dirty="0"/>
-          </a:p>
-        </p:txBody>
-      </p:sp>
-    </p:spTree>
-    <p:extLst>
-      <p:ext uri="{BB962C8B-B14F-4D97-AF65-F5344CB8AC3E}">
-        <p14:creationId xmlns:p14="http://schemas.microsoft.com/office/powerpoint/2010/main" val="1006330754"/>
       </p:ext>
     </p:extLst>
   </p:cSld>

--- a/templates/新的报告模板.pptx
+++ b/templates/新的报告模板.pptx
@@ -3600,7 +3600,7 @@
             </a:r>
             <a:r>
               <a:rPr lang="en-US" altLang="zh-CN" dirty="0" err="1"/>
-              <a:t>CHART:monthly_trend_dual</a:t>
+              <a:t>CHART:product_share_pie</a:t>
             </a:r>
             <a:r>
               <a:rPr lang="en-US" altLang="zh-CN" dirty="0"/>
@@ -3657,7 +3657,7 @@
         <p:spPr>
           <a:xfrm>
             <a:off x="1039017" y="1849030"/>
-            <a:ext cx="3226140" cy="369332"/>
+            <a:ext cx="3067443" cy="369332"/>
           </a:xfrm>
           <a:prstGeom prst="rect">
             <a:avLst/>
@@ -3676,7 +3676,7 @@
             </a:r>
             <a:r>
               <a:rPr lang="en-US" altLang="zh-CN" dirty="0" err="1"/>
-              <a:t>INSIGHT:monthly_trend_dual</a:t>
+              <a:t>INSIGHT:product_share_pie</a:t>
             </a:r>
             <a:r>
               <a:rPr lang="en-US" altLang="zh-CN" dirty="0"/>
@@ -4267,7 +4267,15 @@
           <a:p>
             <a:r>
               <a:rPr lang="zh-CN" altLang="en-US" dirty="0"/>
-              <a:t>产品销售额占比分布</a:t>
+              <a:t>核心 </a:t>
+            </a:r>
+            <a:r>
+              <a:rPr lang="en-US" altLang="zh-CN" dirty="0"/>
+              <a:t>KPI </a:t>
+            </a:r>
+            <a:r>
+              <a:rPr lang="zh-CN" altLang="en-US" dirty="0"/>
+              <a:t>指标概览</a:t>
             </a:r>
             <a:endParaRPr dirty="0"/>
           </a:p>
@@ -4320,7 +4328,7 @@
             </a:r>
             <a:r>
               <a:rPr lang="en-US" dirty="0" err="1"/>
-              <a:t>CHART:product_share</a:t>
+              <a:t>CHART:core_kpi_summary</a:t>
             </a:r>
             <a:r>
               <a:rPr lang="en-US" dirty="0"/>
@@ -4338,7 +4346,7 @@
         <p:spPr>
           <a:xfrm>
             <a:off x="8046720" y="1371600"/>
-            <a:ext cx="2661883" cy="369332"/>
+            <a:ext cx="3089628" cy="369332"/>
           </a:xfrm>
           <a:prstGeom prst="rect">
             <a:avLst/>
@@ -4357,7 +4365,7 @@
             </a:r>
             <a:r>
               <a:rPr lang="en-US" dirty="0" err="1"/>
-              <a:t>INSIGHT:product_share</a:t>
+              <a:t>INSIGHT:core_kpi_summary</a:t>
             </a:r>
             <a:r>
               <a:rPr lang="en-US" dirty="0"/>
@@ -4615,7 +4623,7 @@
             </a:r>
             <a:r>
               <a:rPr lang="en-US" dirty="0" err="1"/>
-              <a:t>CHART:city_ranking</a:t>
+              <a:t>CHART:city_ranking_horizontal</a:t>
             </a:r>
             <a:r>
               <a:rPr lang="en-US" dirty="0"/>
@@ -4634,7 +4642,7 @@
         <p:spPr>
           <a:xfrm>
             <a:off x="8046720" y="1371600"/>
-            <a:ext cx="2151871" cy="369332"/>
+            <a:ext cx="3493842" cy="369332"/>
           </a:xfrm>
           <a:prstGeom prst="rect">
             <a:avLst/>
@@ -4649,15 +4657,15 @@
           <a:p>
             <a:r>
               <a:rPr lang="en-US" dirty="0"/>
-              <a:t>[</a:t>
+              <a:t>{{</a:t>
             </a:r>
             <a:r>
               <a:rPr lang="en-US" dirty="0" err="1"/>
-              <a:t>CHART:city_ranking</a:t>
+              <a:t>INSIGHT:city_ranking_horizontal</a:t>
             </a:r>
             <a:r>
               <a:rPr lang="en-US" dirty="0"/>
-              <a:t>]</a:t>
+              <a:t>}}</a:t>
             </a:r>
             <a:endParaRPr dirty="0"/>
           </a:p>
@@ -4763,7 +4771,7 @@
             </a:r>
             <a:r>
               <a:rPr lang="en-US" dirty="0" err="1"/>
-              <a:t>CHART:salesperson_ranking</a:t>
+              <a:t>CHART:salesperson_ranking_horizontal</a:t>
             </a:r>
             <a:r>
               <a:rPr lang="en-US" dirty="0"/>
@@ -4782,7 +4790,7 @@
         <p:spPr>
           <a:xfrm>
             <a:off x="8046720" y="1371600"/>
-            <a:ext cx="3209725" cy="369332"/>
+            <a:ext cx="4267322" cy="369332"/>
           </a:xfrm>
           <a:prstGeom prst="rect">
             <a:avLst/>
@@ -4801,7 +4809,7 @@
             </a:r>
             <a:r>
               <a:rPr lang="en-US" dirty="0" err="1"/>
-              <a:t>INSIGHT:salesperson_ranking</a:t>
+              <a:t>INSIGHT:salesperson_ranking_horizontal</a:t>
             </a:r>
             <a:r>
               <a:rPr lang="en-US" dirty="0"/>
@@ -4864,7 +4872,7 @@
             </a:r>
             <a:r>
               <a:rPr lang="en-US" dirty="0" err="1"/>
-              <a:t>INSIGHT:monthly_trend_sales</a:t>
+              <a:t>INSIGHT:monthly_trend_dual</a:t>
             </a:r>
             <a:r>
               <a:rPr lang="en-US" dirty="0"/>
@@ -4949,7 +4957,7 @@
             </a:r>
             <a:r>
               <a:rPr lang="en-US" dirty="0" err="1"/>
-              <a:t>CHART:monthly_trend_sales</a:t>
+              <a:t>CHART:monthly_trend_dual</a:t>
             </a:r>
             <a:r>
               <a:rPr lang="en-US" dirty="0"/>
@@ -5006,7 +5014,7 @@
           <a:p>
             <a:r>
               <a:rPr lang="zh-CN" altLang="en-US" dirty="0"/>
-              <a:t>月度订单量趋势</a:t>
+              <a:t>自定义月度趋势</a:t>
             </a:r>
             <a:endParaRPr dirty="0"/>
           </a:p>
@@ -5059,7 +5067,7 @@
             </a:r>
             <a:r>
               <a:rPr lang="en-US" dirty="0" err="1"/>
-              <a:t>CHART:monthly_trend_orders</a:t>
+              <a:t>CHART:custom_monthly_trend_dual</a:t>
             </a:r>
             <a:r>
               <a:rPr lang="en-US" dirty="0"/>
@@ -5078,7 +5086,7 @@
         <p:spPr>
           <a:xfrm>
             <a:off x="457200" y="5212080"/>
-            <a:ext cx="3421001" cy="369332"/>
+            <a:ext cx="4029245" cy="369332"/>
           </a:xfrm>
           <a:prstGeom prst="rect">
             <a:avLst/>
@@ -5097,7 +5105,7 @@
             </a:r>
             <a:r>
               <a:rPr lang="en-US" dirty="0" err="1"/>
-              <a:t>INSIGHT:monthly_trend_orders</a:t>
+              <a:t>INSIGHT:custom_monthly_trend_dual</a:t>
             </a:r>
             <a:r>
               <a:rPr lang="en-US" dirty="0"/>

--- a/templates/新的报告模板.pptx
+++ b/templates/新的报告模板.pptx
@@ -17,7 +17,6 @@
     <p:sldId id="266" r:id="rId11"/>
     <p:sldId id="267" r:id="rId12"/>
     <p:sldId id="268" r:id="rId13"/>
-    <p:sldId id="269" r:id="rId14"/>
   </p:sldIdLst>
   <p:sldSz cx="12192000" cy="6858000"/>
   <p:notesSz cx="6858000" cy="9144000"/>
@@ -3537,168 +3536,6 @@
 </p:sld>
 </file>
 
-<file path=ppt/slides/slide13.xml><?xml version="1.0" encoding="utf-8"?>
-<p:sld xmlns:a="http://schemas.openxmlformats.org/drawingml/2006/main" xmlns:r="http://schemas.openxmlformats.org/officeDocument/2006/relationships" xmlns:p="http://schemas.openxmlformats.org/presentationml/2006/main">
-  <p:cSld>
-    <p:spTree>
-      <p:nvGrpSpPr>
-        <p:cNvPr id="1" name=""/>
-        <p:cNvGrpSpPr/>
-        <p:nvPr/>
-      </p:nvGrpSpPr>
-      <p:grpSpPr>
-        <a:xfrm>
-          <a:off x="0" y="0"/>
-          <a:ext cx="0" cy="0"/>
-          <a:chOff x="0" y="0"/>
-          <a:chExt cx="0" cy="0"/>
-        </a:xfrm>
-      </p:grpSpPr>
-      <p:sp>
-        <p:nvSpPr>
-          <p:cNvPr id="2" name="矩形 1">
-            <a:extLst>
-              <a:ext uri="{FF2B5EF4-FFF2-40B4-BE49-F238E27FC236}">
-                <a16:creationId xmlns:a16="http://schemas.microsoft.com/office/drawing/2014/main" id="{BE425793-6A16-ECF1-4B70-F2855E9017EA}"/>
-              </a:ext>
-            </a:extLst>
-          </p:cNvPr>
-          <p:cNvSpPr/>
-          <p:nvPr/>
-        </p:nvSpPr>
-        <p:spPr>
-          <a:xfrm>
-            <a:off x="5240458" y="1513490"/>
-            <a:ext cx="6180083" cy="4181015"/>
-          </a:xfrm>
-          <a:prstGeom prst="rect">
-            <a:avLst/>
-          </a:prstGeom>
-        </p:spPr>
-        <p:style>
-          <a:lnRef idx="1">
-            <a:schemeClr val="accent1"/>
-          </a:lnRef>
-          <a:fillRef idx="3">
-            <a:schemeClr val="accent1"/>
-          </a:fillRef>
-          <a:effectRef idx="2">
-            <a:schemeClr val="accent1"/>
-          </a:effectRef>
-          <a:fontRef idx="minor">
-            <a:schemeClr val="lt1"/>
-          </a:fontRef>
-        </p:style>
-        <p:txBody>
-          <a:bodyPr rtlCol="0" anchor="ctr"/>
-          <a:lstStyle/>
-          <a:p>
-            <a:pPr algn="ctr"/>
-            <a:r>
-              <a:rPr lang="en-US" altLang="zh-CN" dirty="0"/>
-              <a:t>[</a:t>
-            </a:r>
-            <a:r>
-              <a:rPr lang="en-US" altLang="zh-CN" dirty="0" err="1"/>
-              <a:t>CHART:product_share_pie</a:t>
-            </a:r>
-            <a:r>
-              <a:rPr lang="en-US" altLang="zh-CN" dirty="0"/>
-              <a:t>]</a:t>
-            </a:r>
-            <a:endParaRPr lang="zh-CN" altLang="en-US" dirty="0"/>
-          </a:p>
-        </p:txBody>
-      </p:sp>
-      <p:sp>
-        <p:nvSpPr>
-          <p:cNvPr id="3" name="文本框 2">
-            <a:extLst>
-              <a:ext uri="{FF2B5EF4-FFF2-40B4-BE49-F238E27FC236}">
-                <a16:creationId xmlns:a16="http://schemas.microsoft.com/office/drawing/2014/main" id="{29A9A806-473D-37B7-BE4F-455A7EF285BA}"/>
-              </a:ext>
-            </a:extLst>
-          </p:cNvPr>
-          <p:cNvSpPr txBox="1"/>
-          <p:nvPr/>
-        </p:nvSpPr>
-        <p:spPr>
-          <a:xfrm>
-            <a:off x="1705855" y="3672968"/>
-            <a:ext cx="184731" cy="369332"/>
-          </a:xfrm>
-          <a:prstGeom prst="rect">
-            <a:avLst/>
-          </a:prstGeom>
-          <a:noFill/>
-        </p:spPr>
-        <p:txBody>
-          <a:bodyPr wrap="none" rtlCol="0">
-            <a:spAutoFit/>
-          </a:bodyPr>
-          <a:lstStyle/>
-          <a:p>
-            <a:endParaRPr lang="zh-CN" altLang="en-US" dirty="0"/>
-          </a:p>
-        </p:txBody>
-      </p:sp>
-      <p:sp>
-        <p:nvSpPr>
-          <p:cNvPr id="8" name="TextBox 4">
-            <a:extLst>
-              <a:ext uri="{FF2B5EF4-FFF2-40B4-BE49-F238E27FC236}">
-                <a16:creationId xmlns:a16="http://schemas.microsoft.com/office/drawing/2014/main" id="{38BA3899-CA74-E6FD-4376-3E353B599B76}"/>
-              </a:ext>
-            </a:extLst>
-          </p:cNvPr>
-          <p:cNvSpPr txBox="1"/>
-          <p:nvPr/>
-        </p:nvSpPr>
-        <p:spPr>
-          <a:xfrm>
-            <a:off x="1039017" y="1849030"/>
-            <a:ext cx="3067443" cy="369332"/>
-          </a:xfrm>
-          <a:prstGeom prst="rect">
-            <a:avLst/>
-          </a:prstGeom>
-          <a:noFill/>
-        </p:spPr>
-        <p:txBody>
-          <a:bodyPr wrap="none">
-            <a:spAutoFit/>
-          </a:bodyPr>
-          <a:lstStyle/>
-          <a:p>
-            <a:r>
-              <a:rPr lang="en-US" altLang="zh-CN" dirty="0"/>
-              <a:t>{{</a:t>
-            </a:r>
-            <a:r>
-              <a:rPr lang="en-US" altLang="zh-CN" dirty="0" err="1"/>
-              <a:t>INSIGHT:product_share_pie</a:t>
-            </a:r>
-            <a:r>
-              <a:rPr lang="en-US" altLang="zh-CN" dirty="0"/>
-              <a:t>}}</a:t>
-            </a:r>
-            <a:endParaRPr dirty="0"/>
-          </a:p>
-        </p:txBody>
-      </p:sp>
-    </p:spTree>
-    <p:extLst>
-      <p:ext uri="{BB962C8B-B14F-4D97-AF65-F5344CB8AC3E}">
-        <p14:creationId xmlns:p14="http://schemas.microsoft.com/office/powerpoint/2010/main" val="68283920"/>
-      </p:ext>
-    </p:extLst>
-  </p:cSld>
-  <p:clrMapOvr>
-    <a:masterClrMapping/>
-  </p:clrMapOvr>
-</p:sld>
-</file>
-
 <file path=ppt/slides/slide2.xml><?xml version="1.0" encoding="utf-8"?>
 <p:sld xmlns:a="http://schemas.openxmlformats.org/drawingml/2006/main" xmlns:r="http://schemas.openxmlformats.org/officeDocument/2006/relationships" xmlns:p="http://schemas.openxmlformats.org/presentationml/2006/main">
   <p:cSld>
@@ -4422,7 +4259,7 @@
           <a:p>
             <a:r>
               <a:rPr lang="zh-CN" altLang="en-US" dirty="0"/>
-              <a:t>新客与老客经营效能对比</a:t>
+              <a:t>销售员业绩排名分析</a:t>
             </a:r>
             <a:endParaRPr dirty="0"/>
           </a:p>
@@ -4475,7 +4312,7 @@
             </a:r>
             <a:r>
               <a:rPr lang="en-US" dirty="0" err="1"/>
-              <a:t>CHART:customer_type_comparison</a:t>
+              <a:t>CHART:salesperson_ranking</a:t>
             </a:r>
             <a:r>
               <a:rPr lang="en-US" dirty="0"/>
@@ -4494,7 +4331,7 @@
         <p:spPr>
           <a:xfrm>
             <a:off x="5760720" y="1371600"/>
-            <a:ext cx="3926652" cy="369332"/>
+            <a:ext cx="3209725" cy="369332"/>
           </a:xfrm>
           <a:prstGeom prst="rect">
             <a:avLst/>
@@ -4513,7 +4350,7 @@
             </a:r>
             <a:r>
               <a:rPr lang="en-US" dirty="0" err="1"/>
-              <a:t>INSIGHT:customer_type_comparison</a:t>
+              <a:t>INSIGHT:salesperson_ranking</a:t>
             </a:r>
             <a:r>
               <a:rPr lang="en-US" dirty="0"/>
@@ -4570,7 +4407,7 @@
           <a:p>
             <a:r>
               <a:rPr lang="zh-CN" altLang="en-US" dirty="0"/>
-              <a:t>城市销售业绩排名</a:t>
+              <a:t>城市销售占比分布</a:t>
             </a:r>
             <a:endParaRPr dirty="0"/>
           </a:p>
@@ -4623,7 +4460,7 @@
             </a:r>
             <a:r>
               <a:rPr lang="en-US" dirty="0" err="1"/>
-              <a:t>CHART:city_ranking_horizontal</a:t>
+              <a:t>CHART:city_sales_pie</a:t>
             </a:r>
             <a:r>
               <a:rPr lang="en-US" dirty="0"/>
@@ -4642,7 +4479,7 @@
         <p:spPr>
           <a:xfrm>
             <a:off x="8046720" y="1371600"/>
-            <a:ext cx="3493842" cy="369332"/>
+            <a:ext cx="2604496" cy="369332"/>
           </a:xfrm>
           <a:prstGeom prst="rect">
             <a:avLst/>
@@ -4661,7 +4498,7 @@
             </a:r>
             <a:r>
               <a:rPr lang="en-US" dirty="0" err="1"/>
-              <a:t>INSIGHT:city_ranking_horizontal</a:t>
+              <a:t>INSIGHT:city_sales_pie</a:t>
             </a:r>
             <a:r>
               <a:rPr lang="en-US" dirty="0"/>
@@ -4718,7 +4555,7 @@
           <a:p>
             <a:r>
               <a:rPr lang="zh-CN" altLang="en-US" dirty="0"/>
-              <a:t>销售员业绩排名</a:t>
+              <a:t>新老客销售与订单对比</a:t>
             </a:r>
             <a:endParaRPr dirty="0"/>
           </a:p>
@@ -4771,7 +4608,7 @@
             </a:r>
             <a:r>
               <a:rPr lang="en-US" dirty="0" err="1"/>
-              <a:t>CHART:salesperson_ranking_horizontal</a:t>
+              <a:t>CHART:customer_segment_comparison</a:t>
             </a:r>
             <a:r>
               <a:rPr lang="en-US" dirty="0"/>
@@ -4790,7 +4627,7 @@
         <p:spPr>
           <a:xfrm>
             <a:off x="8046720" y="1371600"/>
-            <a:ext cx="4267322" cy="369332"/>
+            <a:ext cx="4318875" cy="369332"/>
           </a:xfrm>
           <a:prstGeom prst="rect">
             <a:avLst/>
@@ -4809,7 +4646,7 @@
             </a:r>
             <a:r>
               <a:rPr lang="en-US" dirty="0" err="1"/>
-              <a:t>INSIGHT:salesperson_ranking_horizontal</a:t>
+              <a:t>INSIGHT:customer_segment_comparison</a:t>
             </a:r>
             <a:r>
               <a:rPr lang="en-US" dirty="0"/>
@@ -4872,7 +4709,7 @@
             </a:r>
             <a:r>
               <a:rPr lang="en-US" dirty="0" err="1"/>
-              <a:t>INSIGHT:monthly_trend_dual</a:t>
+              <a:t>INSIGHT:monthly_sales_trend</a:t>
             </a:r>
             <a:r>
               <a:rPr lang="en-US" dirty="0"/>
@@ -4904,7 +4741,7 @@
           <a:p>
             <a:r>
               <a:rPr lang="zh-CN" altLang="en-US" dirty="0"/>
-              <a:t>月度销售额与订单趋势</a:t>
+              <a:t>月度销售趋势分析</a:t>
             </a:r>
             <a:endParaRPr dirty="0"/>
           </a:p>
@@ -4957,7 +4794,7 @@
             </a:r>
             <a:r>
               <a:rPr lang="en-US" dirty="0" err="1"/>
-              <a:t>CHART:monthly_trend_dual</a:t>
+              <a:t>CHART:monthly_sales_trend</a:t>
             </a:r>
             <a:r>
               <a:rPr lang="en-US" dirty="0"/>

--- a/templates/新的报告模板.pptx
+++ b/templates/新的报告模板.pptx
@@ -4460,7 +4460,7 @@
             </a:r>
             <a:r>
               <a:rPr lang="en-US" dirty="0" err="1"/>
-              <a:t>CHART:city_sales_pie</a:t>
+              <a:t>CHART:city_composition</a:t>
             </a:r>
             <a:r>
               <a:rPr lang="en-US" dirty="0"/>
@@ -4479,7 +4479,7 @@
         <p:spPr>
           <a:xfrm>
             <a:off x="8046720" y="1371600"/>
-            <a:ext cx="2604496" cy="369332"/>
+            <a:ext cx="2902333" cy="369332"/>
           </a:xfrm>
           <a:prstGeom prst="rect">
             <a:avLst/>
@@ -4498,7 +4498,7 @@
             </a:r>
             <a:r>
               <a:rPr lang="en-US" dirty="0" err="1"/>
-              <a:t>INSIGHT:city_sales_pie</a:t>
+              <a:t>INSIGHT:city_composition</a:t>
             </a:r>
             <a:r>
               <a:rPr lang="en-US" dirty="0"/>
@@ -4608,7 +4608,7 @@
             </a:r>
             <a:r>
               <a:rPr lang="en-US" dirty="0" err="1"/>
-              <a:t>CHART:customer_segment_comparison</a:t>
+              <a:t>CHART:customer_attribute_comparison</a:t>
             </a:r>
             <a:r>
               <a:rPr lang="en-US" dirty="0"/>
@@ -4646,7 +4646,7 @@
             </a:r>
             <a:r>
               <a:rPr lang="en-US" dirty="0" err="1"/>
-              <a:t>INSIGHT:customer_segment_comparison</a:t>
+              <a:t>INSIGHT:customer_attribute_comparison</a:t>
             </a:r>
             <a:r>
               <a:rPr lang="en-US" dirty="0"/>
@@ -4904,7 +4904,7 @@
             </a:r>
             <a:r>
               <a:rPr lang="en-US" dirty="0" err="1"/>
-              <a:t>CHART:custom_monthly_trend_dual</a:t>
+              <a:t>CHART:anomaly_orders_table</a:t>
             </a:r>
             <a:r>
               <a:rPr lang="en-US" dirty="0"/>
@@ -4923,7 +4923,7 @@
         <p:spPr>
           <a:xfrm>
             <a:off x="457200" y="5212080"/>
-            <a:ext cx="4029245" cy="369332"/>
+            <a:ext cx="3407279" cy="369332"/>
           </a:xfrm>
           <a:prstGeom prst="rect">
             <a:avLst/>
@@ -4942,7 +4942,7 @@
             </a:r>
             <a:r>
               <a:rPr lang="en-US" dirty="0" err="1"/>
-              <a:t>INSIGHT:custom_monthly_trend_dual</a:t>
+              <a:t>INSIGHT:anomaly_orders_table</a:t>
             </a:r>
             <a:r>
               <a:rPr lang="en-US" dirty="0"/>

--- a/templates/新的报告模板.pptx
+++ b/templates/新的报告模板.pptx
@@ -4460,7 +4460,7 @@
             </a:r>
             <a:r>
               <a:rPr lang="en-US" dirty="0" err="1"/>
-              <a:t>CHART:city_composition</a:t>
+              <a:t>CHART:city_sales_composition</a:t>
             </a:r>
             <a:r>
               <a:rPr lang="en-US" dirty="0"/>
@@ -4479,7 +4479,7 @@
         <p:spPr>
           <a:xfrm>
             <a:off x="8046720" y="1371600"/>
-            <a:ext cx="2902333" cy="369332"/>
+            <a:ext cx="3476208" cy="369332"/>
           </a:xfrm>
           <a:prstGeom prst="rect">
             <a:avLst/>
@@ -4498,7 +4498,7 @@
             </a:r>
             <a:r>
               <a:rPr lang="en-US" dirty="0" err="1"/>
-              <a:t>INSIGHT:city_composition</a:t>
+              <a:t>INSIGHT:city_sales_composition</a:t>
             </a:r>
             <a:r>
               <a:rPr lang="en-US" dirty="0"/>
@@ -4608,7 +4608,7 @@
             </a:r>
             <a:r>
               <a:rPr lang="en-US" dirty="0" err="1"/>
-              <a:t>CHART:customer_attribute_comparison</a:t>
+              <a:t>CHART:customer_segment_comparison</a:t>
             </a:r>
             <a:r>
               <a:rPr lang="en-US" dirty="0"/>
@@ -4646,7 +4646,7 @@
             </a:r>
             <a:r>
               <a:rPr lang="en-US" dirty="0" err="1"/>
-              <a:t>INSIGHT:customer_attribute_comparison</a:t>
+              <a:t>INSIGHT:customer_segment_comparison</a:t>
             </a:r>
             <a:r>
               <a:rPr lang="en-US" dirty="0"/>
@@ -4904,7 +4904,7 @@
             </a:r>
             <a:r>
               <a:rPr lang="en-US" dirty="0" err="1"/>
-              <a:t>CHART:anomaly_orders_table</a:t>
+              <a:t>CHART:anomaly_orders_overview</a:t>
             </a:r>
             <a:r>
               <a:rPr lang="en-US" dirty="0"/>
@@ -4923,7 +4923,7 @@
         <p:spPr>
           <a:xfrm>
             <a:off x="457200" y="5212080"/>
-            <a:ext cx="3407279" cy="369332"/>
+            <a:ext cx="3789307" cy="369332"/>
           </a:xfrm>
           <a:prstGeom prst="rect">
             <a:avLst/>
@@ -4942,7 +4942,7 @@
             </a:r>
             <a:r>
               <a:rPr lang="en-US" dirty="0" err="1"/>
-              <a:t>INSIGHT:anomaly_orders_table</a:t>
+              <a:t>INSIGHT:anomaly_orders_overview</a:t>
             </a:r>
             <a:r>
               <a:rPr lang="en-US" dirty="0"/>

--- a/templates/新的报告模板.pptx
+++ b/templates/新的报告模板.pptx
@@ -4312,7 +4312,7 @@
             </a:r>
             <a:r>
               <a:rPr lang="en-US" dirty="0" err="1"/>
-              <a:t>CHART:salesperson_ranking</a:t>
+              <a:t>CHART:salesperson_ranking_horizontal</a:t>
             </a:r>
             <a:r>
               <a:rPr lang="en-US" dirty="0"/>
@@ -4331,7 +4331,7 @@
         <p:spPr>
           <a:xfrm>
             <a:off x="5760720" y="1371600"/>
-            <a:ext cx="3209725" cy="369332"/>
+            <a:ext cx="4267322" cy="369332"/>
           </a:xfrm>
           <a:prstGeom prst="rect">
             <a:avLst/>
@@ -4350,7 +4350,7 @@
             </a:r>
             <a:r>
               <a:rPr lang="en-US" dirty="0" err="1"/>
-              <a:t>INSIGHT:salesperson_ranking</a:t>
+              <a:t>INSIGHT:salesperson_ranking_horizontal</a:t>
             </a:r>
             <a:r>
               <a:rPr lang="en-US" dirty="0"/>
@@ -4460,7 +4460,7 @@
             </a:r>
             <a:r>
               <a:rPr lang="en-US" dirty="0" err="1"/>
-              <a:t>CHART:city_sales_composition</a:t>
+              <a:t>CHART:city_sales_pie</a:t>
             </a:r>
             <a:r>
               <a:rPr lang="en-US" dirty="0"/>
@@ -4479,7 +4479,7 @@
         <p:spPr>
           <a:xfrm>
             <a:off x="8046720" y="1371600"/>
-            <a:ext cx="3476208" cy="369332"/>
+            <a:ext cx="2604496" cy="369332"/>
           </a:xfrm>
           <a:prstGeom prst="rect">
             <a:avLst/>
@@ -4498,7 +4498,7 @@
             </a:r>
             <a:r>
               <a:rPr lang="en-US" dirty="0" err="1"/>
-              <a:t>INSIGHT:city_sales_composition</a:t>
+              <a:t>INSIGHT:city_sales_pie</a:t>
             </a:r>
             <a:r>
               <a:rPr lang="en-US" dirty="0"/>
@@ -4608,7 +4608,7 @@
             </a:r>
             <a:r>
               <a:rPr lang="en-US" dirty="0" err="1"/>
-              <a:t>CHART:customer_segment_comparison</a:t>
+              <a:t>CHART:customer_attribute_comparison</a:t>
             </a:r>
             <a:r>
               <a:rPr lang="en-US" dirty="0"/>
@@ -4646,7 +4646,7 @@
             </a:r>
             <a:r>
               <a:rPr lang="en-US" dirty="0" err="1"/>
-              <a:t>INSIGHT:customer_segment_comparison</a:t>
+              <a:t>INSIGHT:customer_attribute_comparison</a:t>
             </a:r>
             <a:r>
               <a:rPr lang="en-US" dirty="0"/>
@@ -4904,7 +4904,7 @@
             </a:r>
             <a:r>
               <a:rPr lang="en-US" dirty="0" err="1"/>
-              <a:t>CHART:anomaly_orders_overview</a:t>
+              <a:t>CHART:order_anomaly_scatter</a:t>
             </a:r>
             <a:r>
               <a:rPr lang="en-US" dirty="0"/>
@@ -4923,7 +4923,7 @@
         <p:spPr>
           <a:xfrm>
             <a:off x="457200" y="5212080"/>
-            <a:ext cx="3789307" cy="369332"/>
+            <a:ext cx="3484415" cy="369332"/>
           </a:xfrm>
           <a:prstGeom prst="rect">
             <a:avLst/>
@@ -4942,7 +4942,7 @@
             </a:r>
             <a:r>
               <a:rPr lang="en-US" dirty="0" err="1"/>
-              <a:t>INSIGHT:anomaly_orders_overview</a:t>
+              <a:t>INSIGHT:order_anomaly_scatter</a:t>
             </a:r>
             <a:r>
               <a:rPr lang="en-US" dirty="0"/>

--- a/templates/新的报告模板.pptx
+++ b/templates/新的报告模板.pptx
@@ -16,7 +16,9 @@
     <p:sldId id="264" r:id="rId10"/>
     <p:sldId id="266" r:id="rId11"/>
     <p:sldId id="267" r:id="rId12"/>
-    <p:sldId id="268" r:id="rId13"/>
+    <p:sldId id="269" r:id="rId13"/>
+    <p:sldId id="270" r:id="rId14"/>
+    <p:sldId id="268" r:id="rId15"/>
   </p:sldIdLst>
   <p:sldSz cx="12192000" cy="6858000"/>
   <p:notesSz cx="6858000" cy="9144000"/>
@@ -3457,6 +3459,242 @@
       </p:grpSpPr>
       <p:sp>
         <p:nvSpPr>
+          <p:cNvPr id="4" name="文本框 3">
+            <a:extLst>
+              <a:ext uri="{FF2B5EF4-FFF2-40B4-BE49-F238E27FC236}">
+                <a16:creationId xmlns:a16="http://schemas.microsoft.com/office/drawing/2014/main" id="{51895E09-4C12-2EA9-B38B-182B5C054CDF}"/>
+              </a:ext>
+            </a:extLst>
+          </p:cNvPr>
+          <p:cNvSpPr txBox="1"/>
+          <p:nvPr/>
+        </p:nvSpPr>
+        <p:spPr>
+          <a:xfrm>
+            <a:off x="592666" y="1524001"/>
+            <a:ext cx="5985933" cy="369332"/>
+          </a:xfrm>
+          <a:prstGeom prst="rect">
+            <a:avLst/>
+          </a:prstGeom>
+          <a:noFill/>
+        </p:spPr>
+        <p:txBody>
+          <a:bodyPr wrap="square" rtlCol="0">
+            <a:spAutoFit/>
+          </a:bodyPr>
+          <a:lstStyle/>
+          <a:p>
+            <a:r>
+              <a:rPr lang="en-US" altLang="zh-CN" dirty="0"/>
+              <a:t>[</a:t>
+            </a:r>
+            <a:r>
+              <a:rPr lang="en-US" altLang="zh-CN" dirty="0" err="1"/>
+              <a:t>CHART:city_category_heatmap</a:t>
+            </a:r>
+            <a:r>
+              <a:rPr lang="en-US" altLang="zh-CN" dirty="0"/>
+              <a:t>]</a:t>
+            </a:r>
+            <a:endParaRPr lang="zh-CN" altLang="en-US" dirty="0"/>
+          </a:p>
+        </p:txBody>
+      </p:sp>
+      <p:sp>
+        <p:nvSpPr>
+          <p:cNvPr id="5" name="文本框 4">
+            <a:extLst>
+              <a:ext uri="{FF2B5EF4-FFF2-40B4-BE49-F238E27FC236}">
+                <a16:creationId xmlns:a16="http://schemas.microsoft.com/office/drawing/2014/main" id="{282B0B5A-6C79-09CB-4B29-77B61A6B5099}"/>
+              </a:ext>
+            </a:extLst>
+          </p:cNvPr>
+          <p:cNvSpPr txBox="1"/>
+          <p:nvPr/>
+        </p:nvSpPr>
+        <p:spPr>
+          <a:xfrm>
+            <a:off x="6968066" y="1498603"/>
+            <a:ext cx="4300159" cy="369332"/>
+          </a:xfrm>
+          <a:prstGeom prst="rect">
+            <a:avLst/>
+          </a:prstGeom>
+          <a:noFill/>
+        </p:spPr>
+        <p:txBody>
+          <a:bodyPr wrap="square" rtlCol="0">
+            <a:spAutoFit/>
+          </a:bodyPr>
+          <a:lstStyle/>
+          <a:p>
+            <a:r>
+              <a:rPr lang="en-US" altLang="zh-CN" dirty="0"/>
+              <a:t>{{</a:t>
+            </a:r>
+            <a:r>
+              <a:rPr lang="en-US" altLang="zh-CN" dirty="0" err="1"/>
+              <a:t>INSIGHT:city_category_heatmap</a:t>
+            </a:r>
+            <a:r>
+              <a:rPr lang="en-US" altLang="zh-CN" dirty="0"/>
+              <a:t>}}</a:t>
+            </a:r>
+            <a:endParaRPr lang="zh-CN" altLang="en-US" dirty="0"/>
+          </a:p>
+        </p:txBody>
+      </p:sp>
+    </p:spTree>
+    <p:extLst>
+      <p:ext uri="{BB962C8B-B14F-4D97-AF65-F5344CB8AC3E}">
+        <p14:creationId xmlns:p14="http://schemas.microsoft.com/office/powerpoint/2010/main" val="2539720091"/>
+      </p:ext>
+    </p:extLst>
+  </p:cSld>
+  <p:clrMapOvr>
+    <a:masterClrMapping/>
+  </p:clrMapOvr>
+</p:sld>
+</file>
+
+<file path=ppt/slides/slide13.xml><?xml version="1.0" encoding="utf-8"?>
+<p:sld xmlns:a="http://schemas.openxmlformats.org/drawingml/2006/main" xmlns:r="http://schemas.openxmlformats.org/officeDocument/2006/relationships" xmlns:p="http://schemas.openxmlformats.org/presentationml/2006/main">
+  <p:cSld>
+    <p:spTree>
+      <p:nvGrpSpPr>
+        <p:cNvPr id="1" name=""/>
+        <p:cNvGrpSpPr/>
+        <p:nvPr/>
+      </p:nvGrpSpPr>
+      <p:grpSpPr>
+        <a:xfrm>
+          <a:off x="0" y="0"/>
+          <a:ext cx="0" cy="0"/>
+          <a:chOff x="0" y="0"/>
+          <a:chExt cx="0" cy="0"/>
+        </a:xfrm>
+      </p:grpSpPr>
+      <p:sp>
+        <p:nvSpPr>
+          <p:cNvPr id="4" name="文本框 3">
+            <a:extLst>
+              <a:ext uri="{FF2B5EF4-FFF2-40B4-BE49-F238E27FC236}">
+                <a16:creationId xmlns:a16="http://schemas.microsoft.com/office/drawing/2014/main" id="{7498034B-3030-3F95-6288-8099ADF8FE2B}"/>
+              </a:ext>
+            </a:extLst>
+          </p:cNvPr>
+          <p:cNvSpPr txBox="1"/>
+          <p:nvPr/>
+        </p:nvSpPr>
+        <p:spPr>
+          <a:xfrm>
+            <a:off x="618067" y="1261533"/>
+            <a:ext cx="6172200" cy="369332"/>
+          </a:xfrm>
+          <a:prstGeom prst="rect">
+            <a:avLst/>
+          </a:prstGeom>
+          <a:noFill/>
+        </p:spPr>
+        <p:txBody>
+          <a:bodyPr wrap="square" rtlCol="0">
+            <a:spAutoFit/>
+          </a:bodyPr>
+          <a:lstStyle/>
+          <a:p>
+            <a:r>
+              <a:rPr lang="en-US" altLang="zh-CN" dirty="0"/>
+              <a:t>[</a:t>
+            </a:r>
+            <a:r>
+              <a:rPr lang="en-US" altLang="zh-CN" dirty="0" err="1"/>
+              <a:t>CHART:abnormal_order_scatter</a:t>
+            </a:r>
+            <a:r>
+              <a:rPr lang="en-US" altLang="zh-CN" dirty="0"/>
+              <a:t>]</a:t>
+            </a:r>
+            <a:endParaRPr lang="zh-CN" altLang="en-US" dirty="0"/>
+          </a:p>
+        </p:txBody>
+      </p:sp>
+      <p:sp>
+        <p:nvSpPr>
+          <p:cNvPr id="5" name="文本框 4">
+            <a:extLst>
+              <a:ext uri="{FF2B5EF4-FFF2-40B4-BE49-F238E27FC236}">
+                <a16:creationId xmlns:a16="http://schemas.microsoft.com/office/drawing/2014/main" id="{32E8E8D2-E651-85DA-E1A8-B00DAF60790D}"/>
+              </a:ext>
+            </a:extLst>
+          </p:cNvPr>
+          <p:cNvSpPr txBox="1"/>
+          <p:nvPr/>
+        </p:nvSpPr>
+        <p:spPr>
+          <a:xfrm>
+            <a:off x="7238999" y="1261533"/>
+            <a:ext cx="4622800" cy="369332"/>
+          </a:xfrm>
+          <a:prstGeom prst="rect">
+            <a:avLst/>
+          </a:prstGeom>
+          <a:noFill/>
+        </p:spPr>
+        <p:txBody>
+          <a:bodyPr wrap="square" rtlCol="0">
+            <a:spAutoFit/>
+          </a:bodyPr>
+          <a:lstStyle/>
+          <a:p>
+            <a:r>
+              <a:rPr lang="en-US" altLang="zh-CN" dirty="0"/>
+              <a:t>{{</a:t>
+            </a:r>
+            <a:r>
+              <a:rPr lang="en-US" altLang="zh-CN" dirty="0" err="1"/>
+              <a:t>INSIGHT:abnormal_order_scatter</a:t>
+            </a:r>
+            <a:r>
+              <a:rPr lang="en-US" altLang="zh-CN" dirty="0"/>
+              <a:t>}}</a:t>
+            </a:r>
+            <a:endParaRPr lang="zh-CN" altLang="en-US" dirty="0"/>
+          </a:p>
+        </p:txBody>
+      </p:sp>
+    </p:spTree>
+    <p:extLst>
+      <p:ext uri="{BB962C8B-B14F-4D97-AF65-F5344CB8AC3E}">
+        <p14:creationId xmlns:p14="http://schemas.microsoft.com/office/powerpoint/2010/main" val="1439500040"/>
+      </p:ext>
+    </p:extLst>
+  </p:cSld>
+  <p:clrMapOvr>
+    <a:masterClrMapping/>
+  </p:clrMapOvr>
+</p:sld>
+</file>
+
+<file path=ppt/slides/slide14.xml><?xml version="1.0" encoding="utf-8"?>
+<p:sld xmlns:a="http://schemas.openxmlformats.org/drawingml/2006/main" xmlns:r="http://schemas.openxmlformats.org/officeDocument/2006/relationships" xmlns:p="http://schemas.openxmlformats.org/presentationml/2006/main">
+  <p:cSld>
+    <p:spTree>
+      <p:nvGrpSpPr>
+        <p:cNvPr id="1" name=""/>
+        <p:cNvGrpSpPr/>
+        <p:nvPr/>
+      </p:nvGrpSpPr>
+      <p:grpSpPr>
+        <a:xfrm>
+          <a:off x="0" y="0"/>
+          <a:ext cx="0" cy="0"/>
+          <a:chOff x="0" y="0"/>
+          <a:chExt cx="0" cy="0"/>
+        </a:xfrm>
+      </p:grpSpPr>
+      <p:sp>
+        <p:nvSpPr>
           <p:cNvPr id="2" name="Title 1"/>
           <p:cNvSpPr>
             <a:spLocks noGrp="1"/>
@@ -4312,7 +4550,7 @@
             </a:r>
             <a:r>
               <a:rPr lang="en-US" dirty="0" err="1"/>
-              <a:t>CHART:salesperson_ranking_horizontal</a:t>
+              <a:t>CHART:city_sales_ranking_horizontal</a:t>
             </a:r>
             <a:r>
               <a:rPr lang="en-US" dirty="0"/>
@@ -4331,7 +4569,7 @@
         <p:spPr>
           <a:xfrm>
             <a:off x="5760720" y="1371600"/>
-            <a:ext cx="4267322" cy="369332"/>
+            <a:ext cx="4067717" cy="369332"/>
           </a:xfrm>
           <a:prstGeom prst="rect">
             <a:avLst/>
@@ -4350,7 +4588,7 @@
             </a:r>
             <a:r>
               <a:rPr lang="en-US" dirty="0" err="1"/>
-              <a:t>INSIGHT:salesperson_ranking_horizontal</a:t>
+              <a:t>INSIGHT:city_sales_ranking_horizontal</a:t>
             </a:r>
             <a:r>
               <a:rPr lang="en-US" dirty="0"/>
@@ -4407,7 +4645,7 @@
           <a:p>
             <a:r>
               <a:rPr lang="zh-CN" altLang="en-US" dirty="0"/>
-              <a:t>城市销售占比分布</a:t>
+              <a:t>商品类别支付金额占比</a:t>
             </a:r>
             <a:endParaRPr dirty="0"/>
           </a:p>
@@ -4460,7 +4698,7 @@
             </a:r>
             <a:r>
               <a:rPr lang="en-US" dirty="0" err="1"/>
-              <a:t>CHART:city_sales_pie</a:t>
+              <a:t>CHART:category_composition_pie</a:t>
             </a:r>
             <a:r>
               <a:rPr lang="en-US" dirty="0"/>
@@ -4479,7 +4717,7 @@
         <p:spPr>
           <a:xfrm>
             <a:off x="8046720" y="1371600"/>
-            <a:ext cx="2604496" cy="369332"/>
+            <a:ext cx="3785011" cy="369332"/>
           </a:xfrm>
           <a:prstGeom prst="rect">
             <a:avLst/>
@@ -4498,7 +4736,7 @@
             </a:r>
             <a:r>
               <a:rPr lang="en-US" dirty="0" err="1"/>
-              <a:t>INSIGHT:city_sales_pie</a:t>
+              <a:t>INSIGHT:category_composition_pie</a:t>
             </a:r>
             <a:r>
               <a:rPr lang="en-US" dirty="0"/>
@@ -4608,7 +4846,7 @@
             </a:r>
             <a:r>
               <a:rPr lang="en-US" dirty="0" err="1"/>
-              <a:t>CHART:customer_attribute_comparison</a:t>
+              <a:t>CHART:gender_comparison_multi_column</a:t>
             </a:r>
             <a:r>
               <a:rPr lang="en-US" dirty="0"/>
@@ -4627,7 +4865,7 @@
         <p:spPr>
           <a:xfrm>
             <a:off x="8046720" y="1371600"/>
-            <a:ext cx="4318875" cy="369332"/>
+            <a:ext cx="4589654" cy="369332"/>
           </a:xfrm>
           <a:prstGeom prst="rect">
             <a:avLst/>
@@ -4641,16 +4879,8 @@
           <a:lstStyle/>
           <a:p>
             <a:r>
-              <a:rPr lang="en-US" dirty="0"/>
-              <a:t>{{</a:t>
-            </a:r>
-            <a:r>
-              <a:rPr lang="en-US" dirty="0" err="1"/>
-              <a:t>INSIGHT:customer_attribute_comparison</a:t>
-            </a:r>
-            <a:r>
-              <a:rPr lang="en-US" dirty="0"/>
-              <a:t>}}</a:t>
+              <a:rPr lang="it-IT" dirty="0"/>
+              <a:t>{{INSIGHT:gender_comparison_multi_column}}</a:t>
             </a:r>
             <a:endParaRPr dirty="0"/>
           </a:p>
@@ -4709,7 +4939,7 @@
             </a:r>
             <a:r>
               <a:rPr lang="en-US" dirty="0" err="1"/>
-              <a:t>INSIGHT:monthly_sales_trend</a:t>
+              <a:t>INSIGHT:order_trend_line</a:t>
             </a:r>
             <a:r>
               <a:rPr lang="en-US" dirty="0"/>
@@ -4794,7 +5024,7 @@
             </a:r>
             <a:r>
               <a:rPr lang="en-US" dirty="0" err="1"/>
-              <a:t>CHART:monthly_sales_trend</a:t>
+              <a:t>CHART:order_trend_line</a:t>
             </a:r>
             <a:r>
               <a:rPr lang="en-US" dirty="0"/>
@@ -4904,7 +5134,7 @@
             </a:r>
             <a:r>
               <a:rPr lang="en-US" dirty="0" err="1"/>
-              <a:t>CHART:order_anomaly_scatter</a:t>
+              <a:t>CHART:order_status_distribution_pie</a:t>
             </a:r>
             <a:r>
               <a:rPr lang="en-US" dirty="0"/>
@@ -4923,7 +5153,7 @@
         <p:spPr>
           <a:xfrm>
             <a:off x="457200" y="5212080"/>
-            <a:ext cx="3484415" cy="369332"/>
+            <a:ext cx="4093300" cy="369332"/>
           </a:xfrm>
           <a:prstGeom prst="rect">
             <a:avLst/>
@@ -4942,7 +5172,7 @@
             </a:r>
             <a:r>
               <a:rPr lang="en-US" dirty="0" err="1"/>
-              <a:t>INSIGHT:order_anomaly_scatter</a:t>
+              <a:t>INSIGHT:order_status_distribution_pie</a:t>
             </a:r>
             <a:r>
               <a:rPr lang="en-US" dirty="0"/>
